--- a/URBAN_MESH_Presentation.pptx
+++ b/URBAN_MESH_Presentation.pptx
@@ -3771,7 +3771,7 @@
                   </a:extLst>
                 </a:hlinkClick>
               </a:rPr>
-              <a:t>https://smith-mysql-initiated-critical.trycloudflare.com/</a:t>
+              <a:t>https://polyphonic-academy-giant-forge.trycloudflare.com/</a:t>
             </a:r>
             <a:endParaRPr lang="en-US" sz="1050" dirty="0"/>
           </a:p>
